--- a/docs/adr-033-decks/mentible-for-screenwriters.pptx
+++ b/docs/adr-033-decks/mentible-for-screenwriters.pptx
@@ -9020,7 +9020,7 @@
                 </a:solidFill>
                 <a:latin typeface="Georgia"/>
               </a:rPr>
-              <a:t>No sign-up. Nothing leaves your laptop.</a:t>
+              <a:t>No sign-up. Start on your own device.</a:t>
             </a:r>
           </a:p>
         </p:txBody>
@@ -9059,7 +9059,7 @@
                 </a:solidFill>
                 <a:latin typeface="Georgia"/>
               </a:rPr>
-              <a:t>Install me, point me at your research and bible, and we start — everything stays on your own device.</a:t>
+              <a:t>Install me, point me at your research and bible, and we start — your library stays on your own device.</a:t>
             </a:r>
           </a:p>
         </p:txBody>
@@ -9596,13 +9596,13 @@
               </a:spcAft>
             </a:pPr>
             <a:r>
-              <a:rPr sz="1250" b="0" i="0">
+              <a:rPr sz="1100" b="0" i="0">
                 <a:solidFill>
                   <a:srgbClr val="B5822E"/>
                 </a:solidFill>
                 <a:latin typeface="Courier New"/>
               </a:rPr>
-              <a:t>// On the free tier I live entirely on your device. Your unreleased work never leaves it.</a:t>
+              <a:t>// Free tier: your world is stored on your device. When you ask me to draft, the relevant notes are sent to the AI model to write — so choose what you share.</a:t>
             </a:r>
           </a:p>
         </p:txBody>
@@ -19585,8 +19585,8 @@
         </p:nvSpPr>
         <p:spPr>
           <a:xfrm>
-            <a:off x="1371600" y="4983480"/>
-            <a:ext cx="9509760" cy="320040"/>
+            <a:off x="1371600" y="4937760"/>
+            <a:ext cx="9509760" cy="457200"/>
           </a:xfrm>
           <a:prstGeom prst="rect">
             <a:avLst/>
@@ -19600,10 +19600,22 @@
           <a:lstStyle/>
           <a:p>
             <a:pPr algn="l">
+              <a:lnSpc>
+                <a:spcPct val="105000"/>
+              </a:lnSpc>
               <a:spcAft>
                 <a:spcPts val="0"/>
               </a:spcAft>
             </a:pPr>
+            <a:r>
+              <a:rPr sz="1050" b="1" i="1">
+                <a:solidFill>
+                  <a:srgbClr val="B5822E"/>
+                </a:solidFill>
+                <a:latin typeface="Courier New"/>
+              </a:rPr>
+              <a:t>The honest version: </a:t>
+            </a:r>
             <a:r>
               <a:rPr sz="1050" b="0" i="1">
                 <a:solidFill>
@@ -19611,7 +19623,7 @@
                 </a:solidFill>
                 <a:latin typeface="Georgia"/>
               </a:rPr>
-              <a:t>Upgrading makes me a private hosted library that follows you. The free device-only version stays as it is.</a:t>
+              <a:t>drafting sends your notes to a third-party AI model; the hosted tier isn't zero-knowledge; and prose you don't substantially rewrite may not be copyrightable — check your WGA/studio terms.</a:t>
             </a:r>
           </a:p>
         </p:txBody>

--- a/docs/adr-033-decks/mentible-for-screenwriters.pptx
+++ b/docs/adr-033-decks/mentible-for-screenwriters.pptx
@@ -5163,6 +5163,102 @@
                 <a:latin typeface="Georgia"/>
               </a:rPr>
               <a:t>  · feature screenwriter</a:t>
+            </a:r>
+          </a:p>
+        </p:txBody>
+      </p:sp>
+      <p:sp>
+        <p:nvSpPr>
+          <p:cNvPr id="48" name="Rounded Rectangle 47"/>
+          <p:cNvSpPr/>
+          <p:nvPr/>
+        </p:nvSpPr>
+        <p:spPr>
+          <a:xfrm>
+            <a:off x="868680" y="6291072"/>
+            <a:ext cx="10424160" cy="457200"/>
+          </a:xfrm>
+          <a:prstGeom prst="roundRect">
+            <a:avLst>
+              <a:gd name="adj" fmla="val 30000"/>
+            </a:avLst>
+          </a:prstGeom>
+          <a:solidFill>
+            <a:srgbClr val="EDE4F1"/>
+          </a:solidFill>
+          <a:ln w="12700">
+            <a:solidFill>
+              <a:srgbClr val="D3C1DE"/>
+            </a:solidFill>
+          </a:ln>
+          <a:effectLst/>
+        </p:spPr>
+        <p:style>
+          <a:lnRef idx="1">
+            <a:schemeClr val="accent1"/>
+          </a:lnRef>
+          <a:fillRef idx="3">
+            <a:schemeClr val="accent1"/>
+          </a:fillRef>
+          <a:effectRef idx="2">
+            <a:schemeClr val="accent1"/>
+          </a:effectRef>
+          <a:fontRef idx="minor">
+            <a:schemeClr val="lt1"/>
+          </a:fontRef>
+        </p:style>
+        <p:txBody>
+          <a:bodyPr rtlCol="0" anchor="ctr"/>
+          <a:lstStyle/>
+          <a:p>
+            <a:pPr algn="ctr"/>
+          </a:p>
+        </p:txBody>
+      </p:sp>
+      <p:sp>
+        <p:nvSpPr>
+          <p:cNvPr id="49" name="TextBox 48"/>
+          <p:cNvSpPr txBox="1"/>
+          <p:nvPr/>
+        </p:nvSpPr>
+        <p:spPr>
+          <a:xfrm>
+            <a:off x="1097280" y="6291072"/>
+            <a:ext cx="10058400" cy="457200"/>
+          </a:xfrm>
+          <a:prstGeom prst="rect">
+            <a:avLst/>
+          </a:prstGeom>
+          <a:noFill/>
+        </p:spPr>
+        <p:txBody>
+          <a:bodyPr wrap="square" anchor="ctr" lIns="0" rIns="0" tIns="0" bIns="0">
+            <a:spAutoFit/>
+          </a:bodyPr>
+          <a:lstStyle/>
+          <a:p>
+            <a:pPr algn="l">
+              <a:spcAft>
+                <a:spcPts val="0"/>
+              </a:spcAft>
+            </a:pPr>
+            <a:r>
+              <a:rPr sz="1000" b="1" i="0">
+                <a:solidFill>
+                  <a:srgbClr val="6B4880"/>
+                </a:solidFill>
+                <a:latin typeface="Courier New"/>
+              </a:rPr>
+              <a:t>◆ PRODUCT VISION — </a:t>
+            </a:r>
+            <a:r>
+              <a:rPr sz="1000" b="0" i="0">
+                <a:solidFill>
+                  <a:srgbClr val="2A2230"/>
+                </a:solidFill>
+                <a:latin typeface="Georgia"/>
+              </a:rPr>
+              <a:t>a preview of where Mentible is headed. The grounded AI and private hosted sync shown here are on the roadmap, not yet shipped.</a:t>
             </a:r>
           </a:p>
         </p:txBody>
